--- a/Day33-LLMOps/Day33_Deck_LLMOps.pptx
+++ b/Day33-LLMOps/Day33_Deck_LLMOps.pptx
@@ -4496,13 +4496,13 @@
           <a:noFill/>
         </p:spPr>
         <p:txBody>
-          <a:bodyPr wrap="square" lIns="0" rIns="0" tIns="0" bIns="0" anchor="t">
-            <a:spAutoFit/>
-          </a:bodyPr>
-          <a:lstStyle/>
-          <a:p>
-            <a:r>
-              <a:rPr sz="1186" b="0" i="0">
+          <a:bodyPr wrap="none" lIns="0" rIns="0" tIns="0" bIns="0" anchor="t">
+            <a:spAutoFit/>
+          </a:bodyPr>
+          <a:lstStyle/>
+          <a:p>
+            <a:r>
+              <a:rPr sz="1043" b="0" i="0">
                 <a:solidFill>
                   <a:srgbClr val="EAF7F5"/>
                 </a:solidFill>
@@ -4513,7 +4513,7 @@
           </a:p>
           <a:p>
             <a:r>
-              <a:rPr sz="1186" b="0" i="0">
+              <a:rPr sz="1043" b="0" i="0">
                 <a:solidFill>
                   <a:srgbClr val="EAF7F5"/>
                 </a:solidFill>
@@ -4524,7 +4524,7 @@
           </a:p>
           <a:p>
             <a:r>
-              <a:rPr sz="1186" b="0" i="0">
+              <a:rPr sz="1043" b="0" i="0">
                 <a:solidFill>
                   <a:srgbClr val="EAF7F5"/>
                 </a:solidFill>
@@ -4535,7 +4535,7 @@
           </a:p>
           <a:p>
             <a:r>
-              <a:rPr sz="1186" b="0" i="0">
+              <a:rPr sz="1043" b="0" i="0">
                 <a:solidFill>
                   <a:srgbClr val="EAF7F5"/>
                 </a:solidFill>
@@ -4546,7 +4546,7 @@
           </a:p>
           <a:p>
             <a:r>
-              <a:rPr sz="1186" b="0" i="0">
+              <a:rPr sz="1043" b="0" i="0">
                 <a:solidFill>
                   <a:srgbClr val="EAF7F5"/>
                 </a:solidFill>
@@ -4557,7 +4557,7 @@
           </a:p>
           <a:p>
             <a:r>
-              <a:rPr sz="1186" b="0" i="0">
+              <a:rPr sz="1043" b="0" i="0">
                 <a:solidFill>
                   <a:srgbClr val="EAF7F5"/>
                 </a:solidFill>
@@ -4568,7 +4568,7 @@
           </a:p>
           <a:p>
             <a:r>
-              <a:rPr sz="1186" b="0" i="0">
+              <a:rPr sz="1043" b="0" i="0">
                 <a:solidFill>
                   <a:srgbClr val="EAF7F5"/>
                 </a:solidFill>
@@ -4579,7 +4579,7 @@
           </a:p>
           <a:p>
             <a:r>
-              <a:rPr sz="1186" b="0" i="0">
+              <a:rPr sz="1043" b="0" i="0">
                 <a:solidFill>
                   <a:srgbClr val="EAF7F5"/>
                 </a:solidFill>
@@ -4590,7 +4590,7 @@
           </a:p>
           <a:p>
             <a:r>
-              <a:rPr sz="1186" b="0" i="0">
+              <a:rPr sz="1043" b="0" i="0">
                 <a:solidFill>
                   <a:srgbClr val="EAF7F5"/>
                 </a:solidFill>
@@ -4601,7 +4601,7 @@
           </a:p>
           <a:p>
             <a:r>
-              <a:rPr sz="1186" b="0" i="0">
+              <a:rPr sz="1043" b="0" i="0">
                 <a:solidFill>
                   <a:srgbClr val="EAF7F5"/>
                 </a:solidFill>
@@ -4612,7 +4612,7 @@
           </a:p>
           <a:p>
             <a:r>
-              <a:rPr sz="1186" b="0" i="0">
+              <a:rPr sz="1043" b="0" i="0">
                 <a:solidFill>
                   <a:srgbClr val="EAF7F5"/>
                 </a:solidFill>
@@ -8289,13 +8289,13 @@
           <a:noFill/>
         </p:spPr>
         <p:txBody>
-          <a:bodyPr wrap="square" lIns="0" rIns="0" tIns="0" bIns="0" anchor="t">
-            <a:spAutoFit/>
-          </a:bodyPr>
-          <a:lstStyle/>
-          <a:p>
-            <a:r>
-              <a:rPr sz="1186" b="0" i="0">
+          <a:bodyPr wrap="none" lIns="0" rIns="0" tIns="0" bIns="0" anchor="t">
+            <a:spAutoFit/>
+          </a:bodyPr>
+          <a:lstStyle/>
+          <a:p>
+            <a:r>
+              <a:rPr sz="1043" b="0" i="0">
                 <a:solidFill>
                   <a:srgbClr val="EAF7F5"/>
                 </a:solidFill>
@@ -8306,7 +8306,7 @@
           </a:p>
           <a:p>
             <a:r>
-              <a:rPr sz="1186" b="0" i="0">
+              <a:rPr sz="1043" b="0" i="0">
                 <a:solidFill>
                   <a:srgbClr val="EAF7F5"/>
                 </a:solidFill>
@@ -8317,7 +8317,7 @@
           </a:p>
           <a:p>
             <a:r>
-              <a:rPr sz="1186" b="0" i="0">
+              <a:rPr sz="1043" b="0" i="0">
                 <a:solidFill>
                   <a:srgbClr val="EAF7F5"/>
                 </a:solidFill>
@@ -8328,7 +8328,7 @@
           </a:p>
           <a:p>
             <a:r>
-              <a:rPr sz="1186" b="0" i="0">
+              <a:rPr sz="1043" b="0" i="0">
                 <a:solidFill>
                   <a:srgbClr val="EAF7F5"/>
                 </a:solidFill>
@@ -8339,7 +8339,7 @@
           </a:p>
           <a:p>
             <a:r>
-              <a:rPr sz="1186" b="0" i="0">
+              <a:rPr sz="1043" b="0" i="0">
                 <a:solidFill>
                   <a:srgbClr val="EAF7F5"/>
                 </a:solidFill>
@@ -8350,7 +8350,7 @@
           </a:p>
           <a:p>
             <a:r>
-              <a:rPr sz="1186" b="0" i="0">
+              <a:rPr sz="1043" b="0" i="0">
                 <a:solidFill>
                   <a:srgbClr val="EAF7F5"/>
                 </a:solidFill>
@@ -8361,7 +8361,7 @@
           </a:p>
           <a:p>
             <a:r>
-              <a:rPr sz="1186" b="0" i="0">
+              <a:rPr sz="1043" b="0" i="0">
                 <a:solidFill>
                   <a:srgbClr val="EAF7F5"/>
                 </a:solidFill>
@@ -8372,7 +8372,7 @@
           </a:p>
           <a:p>
             <a:r>
-              <a:rPr sz="1186" b="0" i="0">
+              <a:rPr sz="1043" b="0" i="0">
                 <a:solidFill>
                   <a:srgbClr val="EAF7F5"/>
                 </a:solidFill>
@@ -19528,13 +19528,13 @@
           <a:noFill/>
         </p:spPr>
         <p:txBody>
-          <a:bodyPr wrap="square" lIns="0" rIns="0" tIns="0" bIns="0" anchor="t">
-            <a:spAutoFit/>
-          </a:bodyPr>
-          <a:lstStyle/>
-          <a:p>
-            <a:r>
-              <a:rPr sz="1133" b="0" i="0">
+          <a:bodyPr wrap="none" lIns="0" rIns="0" tIns="0" bIns="0" anchor="t">
+            <a:spAutoFit/>
+          </a:bodyPr>
+          <a:lstStyle/>
+          <a:p>
+            <a:r>
+              <a:rPr sz="997" b="0" i="0">
                 <a:solidFill>
                   <a:srgbClr val="EAF7F5"/>
                 </a:solidFill>
@@ -19545,7 +19545,7 @@
           </a:p>
           <a:p>
             <a:r>
-              <a:rPr sz="1133" b="0" i="0">
+              <a:rPr sz="997" b="0" i="0">
                 <a:solidFill>
                   <a:srgbClr val="EAF7F5"/>
                 </a:solidFill>
@@ -19556,7 +19556,7 @@
           </a:p>
           <a:p>
             <a:r>
-              <a:rPr sz="1133" b="0" i="0">
+              <a:rPr sz="997" b="0" i="0">
                 <a:solidFill>
                   <a:srgbClr val="EAF7F5"/>
                 </a:solidFill>
@@ -19567,7 +19567,7 @@
           </a:p>
           <a:p>
             <a:r>
-              <a:rPr sz="1133" b="0" i="0">
+              <a:rPr sz="997" b="0" i="0">
                 <a:solidFill>
                   <a:srgbClr val="EAF7F5"/>
                 </a:solidFill>
@@ -19578,7 +19578,7 @@
           </a:p>
           <a:p>
             <a:r>
-              <a:rPr sz="1133" b="0" i="0">
+              <a:rPr sz="997" b="0" i="0">
                 <a:solidFill>
                   <a:srgbClr val="EAF7F5"/>
                 </a:solidFill>
@@ -19589,7 +19589,7 @@
           </a:p>
           <a:p>
             <a:r>
-              <a:rPr sz="1133" b="0" i="0">
+              <a:rPr sz="997" b="0" i="0">
                 <a:solidFill>
                   <a:srgbClr val="EAF7F5"/>
                 </a:solidFill>
@@ -19600,7 +19600,7 @@
           </a:p>
           <a:p>
             <a:r>
-              <a:rPr sz="1133" b="0" i="0">
+              <a:rPr sz="997" b="0" i="0">
                 <a:solidFill>
                   <a:srgbClr val="EAF7F5"/>
                 </a:solidFill>
@@ -19611,7 +19611,7 @@
           </a:p>
           <a:p>
             <a:r>
-              <a:rPr sz="1133" b="0" i="0">
+              <a:rPr sz="997" b="0" i="0">
                 <a:solidFill>
                   <a:srgbClr val="EAF7F5"/>
                 </a:solidFill>
@@ -19622,7 +19622,7 @@
           </a:p>
           <a:p>
             <a:r>
-              <a:rPr sz="1133" b="0" i="0">
+              <a:rPr sz="997" b="0" i="0">
                 <a:solidFill>
                   <a:srgbClr val="EAF7F5"/>
                 </a:solidFill>
@@ -19633,7 +19633,7 @@
           </a:p>
           <a:p>
             <a:r>
-              <a:rPr sz="1133" b="0" i="0">
+              <a:rPr sz="997" b="0" i="0">
                 <a:solidFill>
                   <a:srgbClr val="EAF7F5"/>
                 </a:solidFill>
